--- a/presentation/Presentation.pptx
+++ b/presentation/Presentation.pptx
@@ -6,6 +6,7 @@
   </p:sldMasterIdLst>
   <p:sldIdLst>
     <p:sldId id="256" r:id="rId3"/>
+    <p:sldId id="257" r:id="rId4"/>
   </p:sldIdLst>
   <p:sldSz cx="10080625" cy="5670550"/>
   <p:notesSz cx="7559675" cy="10691813"/>
@@ -13,6 +14,176 @@
 </file>
 
 <file path=ppt/slideLayouts/slideLayout1.xml><?xml version="1.0" encoding="utf-8"?>
+<p:sldLayout xmlns:a="http://schemas.openxmlformats.org/drawingml/2006/main" xmlns:p="http://schemas.openxmlformats.org/presentationml/2006/main" xmlns:r="http://schemas.openxmlformats.org/officeDocument/2006/relationships" xmlns:p14="http://schemas.microsoft.com/office/powerpoint/2010/main" xmlns:p15="http://schemas.microsoft.com/office/powerpoint/2012/main" xmlns:mc="http://schemas.openxmlformats.org/markup-compatibility/2006" type="tx" preserve="1">
+  <p:cSld name="Default">
+    <p:spTree>
+      <p:nvGrpSpPr>
+        <p:cNvPr id="1" name=""/>
+        <p:cNvGrpSpPr/>
+        <p:nvPr/>
+      </p:nvGrpSpPr>
+      <p:grpSpPr>
+        <a:xfrm>
+          <a:off x="0" y="0"/>
+          <a:ext cx="0" cy="0"/>
+          <a:chOff x="0" y="0"/>
+          <a:chExt cx="0" cy="0"/>
+        </a:xfrm>
+      </p:grpSpPr>
+      <p:sp>
+        <p:nvSpPr>
+          <p:cNvPr id="7" name="PlaceHolder 1"/>
+          <p:cNvSpPr>
+            <a:spLocks noGrp="1"/>
+          </p:cNvSpPr>
+          <p:nvPr>
+            <p:ph type="title"/>
+          </p:nvPr>
+        </p:nvSpPr>
+        <p:spPr>
+          <a:xfrm>
+            <a:off x="504000" y="386280"/>
+            <a:ext cx="9071280" cy="625320"/>
+          </a:xfrm>
+          <a:prstGeom prst="rect">
+            <a:avLst/>
+          </a:prstGeom>
+          <a:noFill/>
+          <a:ln w="0">
+            <a:noFill/>
+          </a:ln>
+        </p:spPr>
+        <p:txBody>
+          <a:bodyPr lIns="0" rIns="0" tIns="0" bIns="0" anchor="ctr">
+            <a:spAutoFit/>
+          </a:bodyPr>
+          <a:p>
+            <a:pPr indent="0" algn="ctr">
+              <a:buNone/>
+            </a:pPr>
+            <a:endParaRPr lang="en-US" sz="4400" b="0" u="none" strike="noStrike">
+              <a:solidFill>
+                <a:srgbClr val="000000"/>
+              </a:solidFill>
+              <a:effectLst/>
+              <a:uFillTx/>
+              <a:latin typeface="Arial"/>
+            </a:endParaRPr>
+          </a:p>
+        </p:txBody>
+      </p:sp>
+      <p:sp>
+        <p:nvSpPr>
+          <p:cNvPr id="8" name="PlaceHolder 2"/>
+          <p:cNvSpPr>
+            <a:spLocks noGrp="1"/>
+          </p:cNvSpPr>
+          <p:nvPr>
+            <p:ph/>
+          </p:nvPr>
+        </p:nvSpPr>
+        <p:spPr>
+          <a:xfrm>
+            <a:off x="504000" y="1326600"/>
+            <a:ext cx="9072000" cy="3288600"/>
+          </a:xfrm>
+          <a:prstGeom prst="rect">
+            <a:avLst/>
+          </a:prstGeom>
+          <a:noFill/>
+          <a:ln w="0">
+            <a:noFill/>
+          </a:ln>
+        </p:spPr>
+        <p:txBody>
+          <a:bodyPr lIns="0" rIns="0" tIns="0" bIns="0" anchor="t">
+            <a:normAutofit/>
+          </a:bodyPr>
+          <a:p>
+            <a:pPr indent="0">
+              <a:spcBef>
+                <a:spcPts val="1417"/>
+              </a:spcBef>
+              <a:buNone/>
+            </a:pPr>
+            <a:endParaRPr lang="en-US" sz="3200" b="0" u="none" strike="noStrike">
+              <a:solidFill>
+                <a:srgbClr val="000000"/>
+              </a:solidFill>
+              <a:effectLst/>
+              <a:uFillTx/>
+              <a:latin typeface="Arial"/>
+            </a:endParaRPr>
+          </a:p>
+        </p:txBody>
+      </p:sp>
+      <p:sp>
+        <p:nvSpPr>
+          <p:cNvPr id="4" name="PlaceHolder 3"/>
+          <p:cNvSpPr>
+            <a:spLocks noGrp="1"/>
+          </p:cNvSpPr>
+          <p:nvPr>
+            <p:ph type="ftr" idx="1"/>
+          </p:nvPr>
+        </p:nvSpPr>
+        <p:spPr/>
+        <p:txBody>
+          <a:bodyPr/>
+          <a:p>
+            <a:r>
+              <a:t>Footer</a:t>
+            </a:r>
+          </a:p>
+        </p:txBody>
+      </p:sp>
+      <p:sp>
+        <p:nvSpPr>
+          <p:cNvPr id="5" name="PlaceHolder 4"/>
+          <p:cNvSpPr>
+            <a:spLocks noGrp="1"/>
+          </p:cNvSpPr>
+          <p:nvPr>
+            <p:ph type="sldNum" idx="2"/>
+          </p:nvPr>
+        </p:nvSpPr>
+        <p:spPr/>
+        <p:txBody>
+          <a:bodyPr/>
+          <a:p>
+            <a:fld id="{C0CBFFEC-ABA3-40C5-93DF-5554F8C6C430}" type="slidenum">
+              <a:t>&lt;#&gt;</a:t>
+            </a:fld>
+          </a:p>
+        </p:txBody>
+      </p:sp>
+      <p:sp>
+        <p:nvSpPr>
+          <p:cNvPr id="6" name="PlaceHolder 5"/>
+          <p:cNvSpPr>
+            <a:spLocks noGrp="1"/>
+          </p:cNvSpPr>
+          <p:nvPr>
+            <p:ph type="dt" idx="3"/>
+          </p:nvPr>
+        </p:nvSpPr>
+        <p:spPr/>
+        <p:txBody>
+          <a:bodyPr/>
+          <a:p>
+            <a:r>
+              <a:rPr lang="en-US"/>
+              <a:t/>
+            </a:r>
+          </a:p>
+        </p:txBody>
+      </p:sp>
+    </p:spTree>
+  </p:cSld>
+</p:sldLayout>
+</file>
+
+<file path=ppt/slideLayouts/slideLayout2.xml><?xml version="1.0" encoding="utf-8"?>
 <p:sldLayout xmlns:a="http://schemas.openxmlformats.org/drawingml/2006/main" xmlns:p="http://schemas.openxmlformats.org/presentationml/2006/main" xmlns:r="http://schemas.openxmlformats.org/officeDocument/2006/relationships" xmlns:p14="http://schemas.microsoft.com/office/powerpoint/2010/main" xmlns:p15="http://schemas.microsoft.com/office/powerpoint/2012/main" xmlns:mc="http://schemas.openxmlformats.org/markup-compatibility/2006" type="title" preserve="1">
   <p:cSld name="Default">
     <p:spTree>
@@ -31,7 +202,7 @@
       </p:grpSpPr>
       <p:sp>
         <p:nvSpPr>
-          <p:cNvPr id="7" name="PlaceHolder 1"/>
+          <p:cNvPr id="9" name="PlaceHolder 1"/>
           <p:cNvSpPr>
             <a:spLocks noGrp="1"/>
           </p:cNvSpPr>
@@ -41,8 +212,8 @@
         </p:nvSpPr>
         <p:spPr>
           <a:xfrm>
-            <a:off x="504000" y="226080"/>
-            <a:ext cx="9071640" cy="946440"/>
+            <a:off x="504000" y="386280"/>
+            <a:ext cx="9071280" cy="625320"/>
           </a:xfrm>
           <a:prstGeom prst="rect">
             <a:avLst/>
@@ -73,7 +244,7 @@
       </p:sp>
       <p:sp>
         <p:nvSpPr>
-          <p:cNvPr id="8" name="PlaceHolder 2"/>
+          <p:cNvPr id="10" name="PlaceHolder 2"/>
           <p:cNvSpPr>
             <a:spLocks noGrp="1"/>
           </p:cNvSpPr>
@@ -84,7 +255,7 @@
         <p:spPr>
           <a:xfrm>
             <a:off x="504000" y="1326600"/>
-            <a:ext cx="9071640" cy="3288240"/>
+            <a:ext cx="9072000" cy="3288600"/>
           </a:xfrm>
           <a:prstGeom prst="rect">
             <a:avLst/>
@@ -120,7 +291,7 @@
             <a:spLocks noGrp="1"/>
           </p:cNvSpPr>
           <p:nvPr>
-            <p:ph type="ftr" idx="2"/>
+            <p:ph type="ftr" idx="1"/>
           </p:nvPr>
         </p:nvSpPr>
         <p:spPr/>
@@ -140,14 +311,14 @@
             <a:spLocks noGrp="1"/>
           </p:cNvSpPr>
           <p:nvPr>
-            <p:ph type="sldNum" idx="3"/>
+            <p:ph type="sldNum" idx="2"/>
           </p:nvPr>
         </p:nvSpPr>
         <p:spPr/>
         <p:txBody>
           <a:bodyPr/>
           <a:p>
-            <a:fld id="{A1379F1F-E723-42AA-BE82-343DA6E500D4}" type="slidenum">
+            <a:fld id="{EB9479AF-A197-4D03-A25D-F46DCE5541E1}" type="slidenum">
               <a:t>&lt;#&gt;</a:t>
             </a:fld>
           </a:p>
@@ -160,7 +331,7 @@
             <a:spLocks noGrp="1"/>
           </p:cNvSpPr>
           <p:nvPr>
-            <p:ph type="dt" idx="1"/>
+            <p:ph type="dt" idx="3"/>
           </p:nvPr>
         </p:nvSpPr>
         <p:spPr/>
@@ -208,8 +379,8 @@
         </p:nvSpPr>
         <p:spPr>
           <a:xfrm>
-            <a:off x="504000" y="226080"/>
-            <a:ext cx="9071640" cy="946440"/>
+            <a:off x="504000" y="561600"/>
+            <a:ext cx="9071280" cy="274680"/>
           </a:xfrm>
           <a:prstGeom prst="rect">
             <a:avLst/>
@@ -221,14 +392,14 @@
         </p:spPr>
         <p:txBody>
           <a:bodyPr lIns="0" rIns="0" tIns="0" bIns="0" anchor="ctr">
-            <a:noAutofit/>
+            <a:spAutoFit/>
           </a:bodyPr>
           <a:p>
-            <a:pPr indent="0" algn="ctr">
+            <a:pPr indent="0">
               <a:buNone/>
             </a:pPr>
             <a:r>
-              <a:rPr lang="en-US" sz="4400" b="0" u="none" strike="noStrike">
+              <a:rPr lang="en-US" sz="1800" b="0" u="none" strike="noStrike">
                 <a:solidFill>
                   <a:srgbClr val="000000"/>
                 </a:solidFill>
@@ -238,7 +409,7 @@
               </a:rPr>
               <a:t>Click to edit the title text format</a:t>
             </a:r>
-            <a:endParaRPr lang="en-US" sz="4400" b="0" u="none" strike="noStrike">
+            <a:endParaRPr lang="en-US" sz="1800" b="0" u="none" strike="noStrike">
               <a:solidFill>
                 <a:srgbClr val="000000"/>
               </a:solidFill>
@@ -256,13 +427,13 @@
             <a:spLocks noGrp="1"/>
           </p:cNvSpPr>
           <p:nvPr>
-            <p:ph type="body"/>
-          </p:nvPr>
-        </p:nvSpPr>
-        <p:spPr>
-          <a:xfrm>
-            <a:off x="504000" y="1326600"/>
-            <a:ext cx="9071640" cy="3288240"/>
+            <p:ph type="ftr" idx="1"/>
+          </p:nvPr>
+        </p:nvSpPr>
+        <p:spPr>
+          <a:xfrm>
+            <a:off x="3447360" y="5165280"/>
+            <a:ext cx="3194640" cy="390240"/>
           </a:xfrm>
           <a:prstGeom prst="rect">
             <a:avLst/>
@@ -274,248 +445,151 @@
         </p:spPr>
         <p:txBody>
           <a:bodyPr lIns="0" rIns="0" tIns="0" bIns="0" anchor="t">
-            <a:normAutofit/>
+            <a:noAutofit/>
           </a:bodyPr>
-          <a:p>
-            <a:pPr marL="432000" indent="-324000">
-              <a:spcBef>
-                <a:spcPts val="1417"/>
-              </a:spcBef>
-              <a:buClr>
-                <a:srgbClr val="000000"/>
-              </a:buClr>
-              <a:buSzPct val="45000"/>
-              <a:buFont typeface="Wingdings" charset="2"/>
-              <a:buChar char=""/>
-            </a:pPr>
-            <a:r>
-              <a:rPr lang="en-US" sz="3200" b="0" u="none" strike="noStrike">
-                <a:solidFill>
-                  <a:srgbClr val="000000"/>
-                </a:solidFill>
-                <a:effectLst/>
-                <a:uFillTx/>
-                <a:latin typeface="Arial"/>
+          <a:lstStyle>
+            <a:lvl1pPr indent="0" algn="ctr">
+              <a:lnSpc>
+                <a:spcPct val="100000"/>
+              </a:lnSpc>
+              <a:buNone/>
+              <a:tabLst>
+                <a:tab algn="l" pos="0"/>
+              </a:tabLst>
+              <a:defRPr lang="en-US" sz="1400" b="0" u="none" strike="noStrike">
+                <a:solidFill>
+                  <a:srgbClr val="000000"/>
+                </a:solidFill>
+                <a:effectLst/>
+                <a:uFillTx/>
+                <a:latin typeface="Times New Roman"/>
+              </a:defRPr>
+            </a:lvl1pPr>
+          </a:lstStyle>
+          <a:p>
+            <a:pPr indent="0" algn="ctr">
+              <a:lnSpc>
+                <a:spcPct val="100000"/>
+              </a:lnSpc>
+              <a:buNone/>
+              <a:tabLst>
+                <a:tab algn="l" pos="0"/>
+              </a:tabLst>
+            </a:pPr>
+            <a:r>
+              <a:rPr lang="en-US" sz="1400" b="0" u="none" strike="noStrike">
+                <a:solidFill>
+                  <a:srgbClr val="000000"/>
+                </a:solidFill>
+                <a:effectLst/>
+                <a:uFillTx/>
+                <a:latin typeface="Times New Roman"/>
               </a:rPr>
-              <a:t>Click to edit the outline text format</a:t>
-            </a:r>
-            <a:endParaRPr lang="en-US" sz="3200" b="0" u="none" strike="noStrike">
-              <a:solidFill>
-                <a:srgbClr val="000000"/>
-              </a:solidFill>
-              <a:effectLst/>
-              <a:uFillTx/>
-              <a:latin typeface="Arial"/>
-            </a:endParaRPr>
-          </a:p>
-          <a:p>
-            <a:pPr marL="864000" lvl="1" indent="-324000">
-              <a:spcBef>
-                <a:spcPts val="1134"/>
-              </a:spcBef>
-              <a:buClr>
-                <a:srgbClr val="000000"/>
-              </a:buClr>
-              <a:buSzPct val="75000"/>
-              <a:buFont typeface="Symbol" charset="2"/>
-              <a:buChar char=""/>
-            </a:pPr>
-            <a:r>
-              <a:rPr lang="en-US" sz="2800" b="0" u="none" strike="noStrike">
-                <a:solidFill>
-                  <a:srgbClr val="000000"/>
-                </a:solidFill>
-                <a:effectLst/>
-                <a:uFillTx/>
-                <a:latin typeface="Arial"/>
+              <a:t>&lt;footer&gt;</a:t>
+            </a:r>
+            <a:endParaRPr lang="en-US" sz="1400" b="0" u="none" strike="noStrike">
+              <a:solidFill>
+                <a:srgbClr val="000000"/>
+              </a:solidFill>
+              <a:effectLst/>
+              <a:uFillTx/>
+              <a:latin typeface="Times New Roman"/>
+            </a:endParaRPr>
+          </a:p>
+        </p:txBody>
+      </p:sp>
+      <p:sp>
+        <p:nvSpPr>
+          <p:cNvPr id="4" name="PlaceHolder 3"/>
+          <p:cNvSpPr>
+            <a:spLocks noGrp="1"/>
+          </p:cNvSpPr>
+          <p:nvPr>
+            <p:ph type="sldNum" idx="2"/>
+          </p:nvPr>
+        </p:nvSpPr>
+        <p:spPr>
+          <a:xfrm>
+            <a:off x="7227360" y="5165280"/>
+            <a:ext cx="2347920" cy="390240"/>
+          </a:xfrm>
+          <a:prstGeom prst="rect">
+            <a:avLst/>
+          </a:prstGeom>
+          <a:noFill/>
+          <a:ln w="0">
+            <a:noFill/>
+          </a:ln>
+        </p:spPr>
+        <p:txBody>
+          <a:bodyPr lIns="0" rIns="0" tIns="0" bIns="0" anchor="t">
+            <a:noAutofit/>
+          </a:bodyPr>
+          <a:lstStyle>
+            <a:lvl1pPr indent="0" algn="r">
+              <a:lnSpc>
+                <a:spcPct val="100000"/>
+              </a:lnSpc>
+              <a:buNone/>
+              <a:tabLst>
+                <a:tab algn="l" pos="0"/>
+              </a:tabLst>
+              <a:defRPr lang="en-US" sz="1400" b="0" u="none" strike="noStrike">
+                <a:solidFill>
+                  <a:srgbClr val="000000"/>
+                </a:solidFill>
+                <a:effectLst/>
+                <a:uFillTx/>
+                <a:latin typeface="Times New Roman"/>
+              </a:defRPr>
+            </a:lvl1pPr>
+          </a:lstStyle>
+          <a:p>
+            <a:pPr indent="0" algn="r">
+              <a:lnSpc>
+                <a:spcPct val="100000"/>
+              </a:lnSpc>
+              <a:buNone/>
+              <a:tabLst>
+                <a:tab algn="l" pos="0"/>
+              </a:tabLst>
+            </a:pPr>
+            <a:fld id="{E0DE4F59-A252-4232-B687-CCD468274181}" type="slidenum">
+              <a:rPr lang="en-US" sz="1400" b="0" u="none" strike="noStrike">
+                <a:solidFill>
+                  <a:srgbClr val="000000"/>
+                </a:solidFill>
+                <a:effectLst/>
+                <a:uFillTx/>
+                <a:latin typeface="Times New Roman"/>
               </a:rPr>
-              <a:t>Second Outline Level</a:t>
-            </a:r>
-            <a:endParaRPr lang="en-US" sz="2800" b="0" u="none" strike="noStrike">
-              <a:solidFill>
-                <a:srgbClr val="000000"/>
-              </a:solidFill>
-              <a:effectLst/>
-              <a:uFillTx/>
-              <a:latin typeface="Arial"/>
-            </a:endParaRPr>
-          </a:p>
-          <a:p>
-            <a:pPr marL="1296000" lvl="2" indent="-288000">
-              <a:spcBef>
-                <a:spcPts val="850"/>
-              </a:spcBef>
-              <a:buClr>
-                <a:srgbClr val="000000"/>
-              </a:buClr>
-              <a:buSzPct val="45000"/>
-              <a:buFont typeface="Wingdings" charset="2"/>
-              <a:buChar char=""/>
-            </a:pPr>
-            <a:r>
-              <a:rPr lang="en-US" sz="2400" b="0" u="none" strike="noStrike">
-                <a:solidFill>
-                  <a:srgbClr val="000000"/>
-                </a:solidFill>
-                <a:effectLst/>
-                <a:uFillTx/>
-                <a:latin typeface="Arial"/>
-              </a:rPr>
-              <a:t>Third Outline Level</a:t>
-            </a:r>
-            <a:endParaRPr lang="en-US" sz="2400" b="0" u="none" strike="noStrike">
-              <a:solidFill>
-                <a:srgbClr val="000000"/>
-              </a:solidFill>
-              <a:effectLst/>
-              <a:uFillTx/>
-              <a:latin typeface="Arial"/>
-            </a:endParaRPr>
-          </a:p>
-          <a:p>
-            <a:pPr marL="1728000" lvl="3" indent="-216000">
-              <a:spcBef>
-                <a:spcPts val="567"/>
-              </a:spcBef>
-              <a:buClr>
-                <a:srgbClr val="000000"/>
-              </a:buClr>
-              <a:buSzPct val="75000"/>
-              <a:buFont typeface="Symbol" charset="2"/>
-              <a:buChar char=""/>
-            </a:pPr>
-            <a:r>
-              <a:rPr lang="en-US" sz="2000" b="0" u="none" strike="noStrike">
-                <a:solidFill>
-                  <a:srgbClr val="000000"/>
-                </a:solidFill>
-                <a:effectLst/>
-                <a:uFillTx/>
-                <a:latin typeface="Arial"/>
-              </a:rPr>
-              <a:t>Fourth Outline Level</a:t>
-            </a:r>
-            <a:endParaRPr lang="en-US" sz="2000" b="0" u="none" strike="noStrike">
-              <a:solidFill>
-                <a:srgbClr val="000000"/>
-              </a:solidFill>
-              <a:effectLst/>
-              <a:uFillTx/>
-              <a:latin typeface="Arial"/>
-            </a:endParaRPr>
-          </a:p>
-          <a:p>
-            <a:pPr marL="2160000" lvl="4" indent="-216000">
-              <a:spcBef>
-                <a:spcPts val="283"/>
-              </a:spcBef>
-              <a:buClr>
-                <a:srgbClr val="000000"/>
-              </a:buClr>
-              <a:buSzPct val="45000"/>
-              <a:buFont typeface="Wingdings" charset="2"/>
-              <a:buChar char=""/>
-            </a:pPr>
-            <a:r>
-              <a:rPr lang="en-US" sz="2000" b="0" u="none" strike="noStrike">
-                <a:solidFill>
-                  <a:srgbClr val="000000"/>
-                </a:solidFill>
-                <a:effectLst/>
-                <a:uFillTx/>
-                <a:latin typeface="Arial"/>
-              </a:rPr>
-              <a:t>Fifth Outline Level</a:t>
-            </a:r>
-            <a:endParaRPr lang="en-US" sz="2000" b="0" u="none" strike="noStrike">
-              <a:solidFill>
-                <a:srgbClr val="000000"/>
-              </a:solidFill>
-              <a:effectLst/>
-              <a:uFillTx/>
-              <a:latin typeface="Arial"/>
-            </a:endParaRPr>
-          </a:p>
-          <a:p>
-            <a:pPr marL="2592000" lvl="5" indent="-216000">
-              <a:spcBef>
-                <a:spcPts val="283"/>
-              </a:spcBef>
-              <a:buClr>
-                <a:srgbClr val="000000"/>
-              </a:buClr>
-              <a:buSzPct val="45000"/>
-              <a:buFont typeface="Wingdings" charset="2"/>
-              <a:buChar char=""/>
-            </a:pPr>
-            <a:r>
-              <a:rPr lang="en-US" sz="2000" b="0" u="none" strike="noStrike">
-                <a:solidFill>
-                  <a:srgbClr val="000000"/>
-                </a:solidFill>
-                <a:effectLst/>
-                <a:uFillTx/>
-                <a:latin typeface="Arial"/>
-              </a:rPr>
-              <a:t>Sixth Outline Level</a:t>
-            </a:r>
-            <a:endParaRPr lang="en-US" sz="2000" b="0" u="none" strike="noStrike">
-              <a:solidFill>
-                <a:srgbClr val="000000"/>
-              </a:solidFill>
-              <a:effectLst/>
-              <a:uFillTx/>
-              <a:latin typeface="Arial"/>
-            </a:endParaRPr>
-          </a:p>
-          <a:p>
-            <a:pPr marL="3024000" lvl="6" indent="-216000">
-              <a:spcBef>
-                <a:spcPts val="283"/>
-              </a:spcBef>
-              <a:buClr>
-                <a:srgbClr val="000000"/>
-              </a:buClr>
-              <a:buSzPct val="45000"/>
-              <a:buFont typeface="Wingdings" charset="2"/>
-              <a:buChar char=""/>
-            </a:pPr>
-            <a:r>
-              <a:rPr lang="en-US" sz="2000" b="0" u="none" strike="noStrike">
-                <a:solidFill>
-                  <a:srgbClr val="000000"/>
-                </a:solidFill>
-                <a:effectLst/>
-                <a:uFillTx/>
-                <a:latin typeface="Arial"/>
-              </a:rPr>
-              <a:t>Seventh Outline Level</a:t>
-            </a:r>
-            <a:endParaRPr lang="en-US" sz="2000" b="0" u="none" strike="noStrike">
-              <a:solidFill>
-                <a:srgbClr val="000000"/>
-              </a:solidFill>
-              <a:effectLst/>
-              <a:uFillTx/>
-              <a:latin typeface="Arial"/>
-            </a:endParaRPr>
-          </a:p>
-        </p:txBody>
-      </p:sp>
-      <p:sp>
-        <p:nvSpPr>
-          <p:cNvPr id="4" name="PlaceHolder 3"/>
-          <p:cNvSpPr>
-            <a:spLocks noGrp="1"/>
-          </p:cNvSpPr>
-          <p:nvPr>
-            <p:ph type="dt" idx="1"/>
+              <a:t>&lt;number&gt;</a:t>
+            </a:fld>
+            <a:endParaRPr lang="en-US" sz="1400" b="0" u="none" strike="noStrike">
+              <a:solidFill>
+                <a:srgbClr val="000000"/>
+              </a:solidFill>
+              <a:effectLst/>
+              <a:uFillTx/>
+              <a:latin typeface="Times New Roman"/>
+            </a:endParaRPr>
+          </a:p>
+        </p:txBody>
+      </p:sp>
+      <p:sp>
+        <p:nvSpPr>
+          <p:cNvPr id="5" name="PlaceHolder 4"/>
+          <p:cNvSpPr>
+            <a:spLocks noGrp="1"/>
+          </p:cNvSpPr>
+          <p:nvPr>
+            <p:ph type="dt" idx="3"/>
           </p:nvPr>
         </p:nvSpPr>
         <p:spPr>
           <a:xfrm>
             <a:off x="504000" y="5165280"/>
-            <a:ext cx="2348280" cy="390600"/>
+            <a:ext cx="2347920" cy="390240"/>
           </a:xfrm>
           <a:prstGeom prst="rect">
             <a:avLst/>
@@ -570,18 +644,18 @@
       </p:sp>
       <p:sp>
         <p:nvSpPr>
-          <p:cNvPr id="5" name="PlaceHolder 4"/>
-          <p:cNvSpPr>
-            <a:spLocks noGrp="1"/>
-          </p:cNvSpPr>
-          <p:nvPr>
-            <p:ph type="ftr" idx="2"/>
-          </p:nvPr>
-        </p:nvSpPr>
-        <p:spPr>
-          <a:xfrm>
-            <a:off x="3447360" y="5165280"/>
-            <a:ext cx="3195000" cy="390600"/>
+          <p:cNvPr id="6" name="PlaceHolder 5"/>
+          <p:cNvSpPr>
+            <a:spLocks noGrp="1"/>
+          </p:cNvSpPr>
+          <p:nvPr>
+            <p:ph type="body"/>
+          </p:nvPr>
+        </p:nvSpPr>
+        <p:spPr>
+          <a:xfrm>
+            <a:off x="504000" y="1326600"/>
+            <a:ext cx="9072000" cy="3288600"/>
           </a:xfrm>
           <a:prstGeom prst="rect">
             <a:avLst/>
@@ -593,109 +667,230 @@
         </p:spPr>
         <p:txBody>
           <a:bodyPr lIns="0" rIns="0" tIns="0" bIns="0" anchor="t">
-            <a:noAutofit/>
+            <a:normAutofit/>
           </a:bodyPr>
-          <a:lstStyle>
-            <a:lvl1pPr indent="0" algn="ctr">
-              <a:buNone/>
-              <a:defRPr lang="en-US" sz="1400" b="0" u="none" strike="noStrike">
-                <a:solidFill>
-                  <a:srgbClr val="000000"/>
-                </a:solidFill>
-                <a:effectLst/>
-                <a:uFillTx/>
-                <a:latin typeface="Times New Roman"/>
-              </a:defRPr>
-            </a:lvl1pPr>
-          </a:lstStyle>
-          <a:p>
-            <a:pPr indent="0" algn="ctr">
-              <a:buNone/>
-            </a:pPr>
-            <a:r>
-              <a:rPr lang="en-US" sz="1400" b="0" u="none" strike="noStrike">
-                <a:solidFill>
-                  <a:srgbClr val="000000"/>
-                </a:solidFill>
-                <a:effectLst/>
-                <a:uFillTx/>
-                <a:latin typeface="Times New Roman"/>
+          <a:p>
+            <a:pPr marL="432000" indent="-324000">
+              <a:spcBef>
+                <a:spcPts val="1417"/>
+              </a:spcBef>
+              <a:buClr>
+                <a:srgbClr val="000000"/>
+              </a:buClr>
+              <a:buSzPct val="45000"/>
+              <a:buFont typeface="Wingdings" charset="2"/>
+              <a:buChar char=""/>
+            </a:pPr>
+            <a:r>
+              <a:rPr lang="en-US" sz="3200" b="0" u="none" strike="noStrike">
+                <a:solidFill>
+                  <a:srgbClr val="000000"/>
+                </a:solidFill>
+                <a:effectLst/>
+                <a:uFillTx/>
+                <a:latin typeface="Arial"/>
               </a:rPr>
-              <a:t>&lt;footer&gt;</a:t>
-            </a:r>
-            <a:endParaRPr lang="en-US" sz="1400" b="0" u="none" strike="noStrike">
-              <a:solidFill>
-                <a:srgbClr val="000000"/>
-              </a:solidFill>
-              <a:effectLst/>
-              <a:uFillTx/>
-              <a:latin typeface="Times New Roman"/>
-            </a:endParaRPr>
-          </a:p>
-        </p:txBody>
-      </p:sp>
-      <p:sp>
-        <p:nvSpPr>
-          <p:cNvPr id="6" name="PlaceHolder 5"/>
-          <p:cNvSpPr>
-            <a:spLocks noGrp="1"/>
-          </p:cNvSpPr>
-          <p:nvPr>
-            <p:ph type="sldNum" idx="3"/>
-          </p:nvPr>
-        </p:nvSpPr>
-        <p:spPr>
-          <a:xfrm>
-            <a:off x="7227360" y="5165280"/>
-            <a:ext cx="2348280" cy="390600"/>
-          </a:xfrm>
-          <a:prstGeom prst="rect">
-            <a:avLst/>
-          </a:prstGeom>
-          <a:noFill/>
-          <a:ln w="0">
-            <a:noFill/>
-          </a:ln>
-        </p:spPr>
-        <p:txBody>
-          <a:bodyPr lIns="0" rIns="0" tIns="0" bIns="0" anchor="t">
-            <a:noAutofit/>
-          </a:bodyPr>
-          <a:lstStyle>
-            <a:lvl1pPr indent="0" algn="r">
-              <a:buNone/>
-              <a:defRPr lang="en-US" sz="1400" b="0" u="none" strike="noStrike">
-                <a:solidFill>
-                  <a:srgbClr val="000000"/>
-                </a:solidFill>
-                <a:effectLst/>
-                <a:uFillTx/>
-                <a:latin typeface="Times New Roman"/>
-              </a:defRPr>
-            </a:lvl1pPr>
-          </a:lstStyle>
-          <a:p>
-            <a:pPr indent="0" algn="r">
-              <a:buNone/>
-            </a:pPr>
-            <a:fld id="{470D2989-695F-4C66-80B3-D487D6551DD7}" type="slidenum">
-              <a:rPr lang="en-US" sz="1400" b="0" u="none" strike="noStrike">
-                <a:solidFill>
-                  <a:srgbClr val="000000"/>
-                </a:solidFill>
-                <a:effectLst/>
-                <a:uFillTx/>
-                <a:latin typeface="Times New Roman"/>
+              <a:t>Click to edit the outline text format</a:t>
+            </a:r>
+            <a:endParaRPr lang="en-US" sz="3200" b="0" u="none" strike="noStrike">
+              <a:solidFill>
+                <a:srgbClr val="000000"/>
+              </a:solidFill>
+              <a:effectLst/>
+              <a:uFillTx/>
+              <a:latin typeface="Arial"/>
+            </a:endParaRPr>
+          </a:p>
+          <a:p>
+            <a:pPr marL="864000" lvl="1" indent="-324000">
+              <a:spcBef>
+                <a:spcPts val="1134"/>
+              </a:spcBef>
+              <a:buClr>
+                <a:srgbClr val="000000"/>
+              </a:buClr>
+              <a:buSzPct val="75000"/>
+              <a:buFont typeface="Symbol" charset="2"/>
+              <a:buChar char=""/>
+            </a:pPr>
+            <a:r>
+              <a:rPr lang="en-US" sz="2800" b="0" u="none" strike="noStrike">
+                <a:solidFill>
+                  <a:srgbClr val="000000"/>
+                </a:solidFill>
+                <a:effectLst/>
+                <a:uFillTx/>
+                <a:latin typeface="Arial"/>
               </a:rPr>
-              <a:t>&lt;number&gt;</a:t>
-            </a:fld>
-            <a:endParaRPr lang="en-US" sz="1400" b="0" u="none" strike="noStrike">
-              <a:solidFill>
-                <a:srgbClr val="000000"/>
-              </a:solidFill>
-              <a:effectLst/>
-              <a:uFillTx/>
-              <a:latin typeface="Times New Roman"/>
+              <a:t>Second Outline Level</a:t>
+            </a:r>
+            <a:endParaRPr lang="en-US" sz="2800" b="0" u="none" strike="noStrike">
+              <a:solidFill>
+                <a:srgbClr val="000000"/>
+              </a:solidFill>
+              <a:effectLst/>
+              <a:uFillTx/>
+              <a:latin typeface="Arial"/>
+            </a:endParaRPr>
+          </a:p>
+          <a:p>
+            <a:pPr marL="1296000" lvl="2" indent="-288000">
+              <a:spcBef>
+                <a:spcPts val="850"/>
+              </a:spcBef>
+              <a:buClr>
+                <a:srgbClr val="000000"/>
+              </a:buClr>
+              <a:buSzPct val="45000"/>
+              <a:buFont typeface="Wingdings" charset="2"/>
+              <a:buChar char=""/>
+            </a:pPr>
+            <a:r>
+              <a:rPr lang="en-US" sz="2400" b="0" u="none" strike="noStrike">
+                <a:solidFill>
+                  <a:srgbClr val="000000"/>
+                </a:solidFill>
+                <a:effectLst/>
+                <a:uFillTx/>
+                <a:latin typeface="Arial"/>
+              </a:rPr>
+              <a:t>Third Outline Level</a:t>
+            </a:r>
+            <a:endParaRPr lang="en-US" sz="2400" b="0" u="none" strike="noStrike">
+              <a:solidFill>
+                <a:srgbClr val="000000"/>
+              </a:solidFill>
+              <a:effectLst/>
+              <a:uFillTx/>
+              <a:latin typeface="Arial"/>
+            </a:endParaRPr>
+          </a:p>
+          <a:p>
+            <a:pPr marL="1728000" lvl="3" indent="-216000">
+              <a:spcBef>
+                <a:spcPts val="567"/>
+              </a:spcBef>
+              <a:buClr>
+                <a:srgbClr val="000000"/>
+              </a:buClr>
+              <a:buSzPct val="75000"/>
+              <a:buFont typeface="Symbol" charset="2"/>
+              <a:buChar char=""/>
+            </a:pPr>
+            <a:r>
+              <a:rPr lang="en-US" sz="2000" b="0" u="none" strike="noStrike">
+                <a:solidFill>
+                  <a:srgbClr val="000000"/>
+                </a:solidFill>
+                <a:effectLst/>
+                <a:uFillTx/>
+                <a:latin typeface="Arial"/>
+              </a:rPr>
+              <a:t>Fourth Outline Level</a:t>
+            </a:r>
+            <a:endParaRPr lang="en-US" sz="2000" b="0" u="none" strike="noStrike">
+              <a:solidFill>
+                <a:srgbClr val="000000"/>
+              </a:solidFill>
+              <a:effectLst/>
+              <a:uFillTx/>
+              <a:latin typeface="Arial"/>
+            </a:endParaRPr>
+          </a:p>
+          <a:p>
+            <a:pPr marL="2160000" lvl="4" indent="-216000">
+              <a:spcBef>
+                <a:spcPts val="283"/>
+              </a:spcBef>
+              <a:buClr>
+                <a:srgbClr val="000000"/>
+              </a:buClr>
+              <a:buSzPct val="45000"/>
+              <a:buFont typeface="Wingdings" charset="2"/>
+              <a:buChar char=""/>
+            </a:pPr>
+            <a:r>
+              <a:rPr lang="en-US" sz="2000" b="0" u="none" strike="noStrike">
+                <a:solidFill>
+                  <a:srgbClr val="000000"/>
+                </a:solidFill>
+                <a:effectLst/>
+                <a:uFillTx/>
+                <a:latin typeface="Arial"/>
+              </a:rPr>
+              <a:t>Fifth Outline Level</a:t>
+            </a:r>
+            <a:endParaRPr lang="en-US" sz="2000" b="0" u="none" strike="noStrike">
+              <a:solidFill>
+                <a:srgbClr val="000000"/>
+              </a:solidFill>
+              <a:effectLst/>
+              <a:uFillTx/>
+              <a:latin typeface="Arial"/>
+            </a:endParaRPr>
+          </a:p>
+          <a:p>
+            <a:pPr marL="2592000" lvl="5" indent="-216000">
+              <a:spcBef>
+                <a:spcPts val="283"/>
+              </a:spcBef>
+              <a:buClr>
+                <a:srgbClr val="000000"/>
+              </a:buClr>
+              <a:buSzPct val="45000"/>
+              <a:buFont typeface="Wingdings" charset="2"/>
+              <a:buChar char=""/>
+            </a:pPr>
+            <a:r>
+              <a:rPr lang="en-US" sz="2000" b="0" u="none" strike="noStrike">
+                <a:solidFill>
+                  <a:srgbClr val="000000"/>
+                </a:solidFill>
+                <a:effectLst/>
+                <a:uFillTx/>
+                <a:latin typeface="Arial"/>
+              </a:rPr>
+              <a:t>Sixth Outline Level</a:t>
+            </a:r>
+            <a:endParaRPr lang="en-US" sz="2000" b="0" u="none" strike="noStrike">
+              <a:solidFill>
+                <a:srgbClr val="000000"/>
+              </a:solidFill>
+              <a:effectLst/>
+              <a:uFillTx/>
+              <a:latin typeface="Arial"/>
+            </a:endParaRPr>
+          </a:p>
+          <a:p>
+            <a:pPr marL="3024000" lvl="6" indent="-216000">
+              <a:spcBef>
+                <a:spcPts val="283"/>
+              </a:spcBef>
+              <a:buClr>
+                <a:srgbClr val="000000"/>
+              </a:buClr>
+              <a:buSzPct val="45000"/>
+              <a:buFont typeface="Wingdings" charset="2"/>
+              <a:buChar char=""/>
+            </a:pPr>
+            <a:r>
+              <a:rPr lang="en-US" sz="2000" b="0" u="none" strike="noStrike">
+                <a:solidFill>
+                  <a:srgbClr val="000000"/>
+                </a:solidFill>
+                <a:effectLst/>
+                <a:uFillTx/>
+                <a:latin typeface="Arial"/>
+              </a:rPr>
+              <a:t>Seventh Outline Level</a:t>
+            </a:r>
+            <a:endParaRPr lang="en-US" sz="2000" b="0" u="none" strike="noStrike">
+              <a:solidFill>
+                <a:srgbClr val="000000"/>
+              </a:solidFill>
+              <a:effectLst/>
+              <a:uFillTx/>
+              <a:latin typeface="Arial"/>
             </a:endParaRPr>
           </a:p>
         </p:txBody>
@@ -705,6 +900,7 @@
   <p:clrMap bg1="lt1" tx1="dk1" bg2="lt2" tx2="dk2" accent1="accent1" accent2="accent2" accent3="accent3" accent4="accent4" accent5="accent5" accent6="accent6" hlink="hlink" folHlink="folHlink"/>
   <p:sldLayoutIdLst>
     <p:sldLayoutId id="2147483649" r:id="rId2"/>
+    <p:sldLayoutId id="2147483650" r:id="rId3"/>
   </p:sldLayoutIdLst>
 </p:sldMaster>
 </file>
@@ -728,7 +924,7 @@
       </p:grpSpPr>
       <p:pic>
         <p:nvPicPr>
-          <p:cNvPr id="9" name=""/>
+          <p:cNvPr id="11" name=""/>
           <p:cNvPicPr/>
           <p:nvPr/>
         </p:nvPicPr>
@@ -739,7 +935,7 @@
         <p:spPr>
           <a:xfrm>
             <a:off x="-21240" y="0"/>
-            <a:ext cx="10079640" cy="5669640"/>
+            <a:ext cx="10079280" cy="5669280"/>
           </a:xfrm>
           <a:prstGeom prst="rect">
             <a:avLst/>
@@ -752,7 +948,7 @@
       </p:pic>
       <p:sp>
         <p:nvSpPr>
-          <p:cNvPr id="10" name="PlaceHolder 1"/>
+          <p:cNvPr id="12" name="PlaceHolder 1"/>
           <p:cNvSpPr>
             <a:spLocks noGrp="1"/>
           </p:cNvSpPr>
@@ -762,8 +958,8 @@
         </p:nvSpPr>
         <p:spPr>
           <a:xfrm>
-            <a:off x="504000" y="226080"/>
-            <a:ext cx="9071640" cy="946440"/>
+            <a:off x="457200" y="2253600"/>
+            <a:ext cx="9071280" cy="946800"/>
           </a:xfrm>
           <a:prstGeom prst="rect">
             <a:avLst/>
@@ -778,34 +974,44 @@
             <a:spAutoFit/>
           </a:bodyPr>
           <a:p>
-            <a:pPr indent="0" algn="ctr">
+            <a:pPr indent="0">
+              <a:lnSpc>
+                <a:spcPct val="100000"/>
+              </a:lnSpc>
               <a:buNone/>
             </a:pPr>
-            <a:endParaRPr lang="en-US" sz="4400" b="0" u="none" strike="noStrike">
-              <a:solidFill>
-                <a:srgbClr val="000000"/>
-              </a:solidFill>
-              <a:effectLst/>
-              <a:uFillTx/>
-              <a:latin typeface="Arial"/>
-            </a:endParaRPr>
-          </a:p>
-        </p:txBody>
-      </p:sp>
-      <p:sp>
-        <p:nvSpPr>
-          <p:cNvPr id="11" name="PlaceHolder 2"/>
-          <p:cNvSpPr>
-            <a:spLocks noGrp="1"/>
-          </p:cNvSpPr>
-          <p:nvPr>
-            <p:ph type="subTitle"/>
-          </p:nvPr>
-        </p:nvSpPr>
-        <p:spPr>
-          <a:xfrm>
-            <a:off x="504000" y="1326600"/>
-            <a:ext cx="9071640" cy="3288240"/>
+            <a:r>
+              <a:rPr lang="en-US" sz="4000" b="0" i="1" u="none" strike="noStrike">
+                <a:solidFill>
+                  <a:srgbClr val="000000"/>
+                </a:solidFill>
+                <a:effectLst/>
+                <a:uFillTx/>
+                <a:latin typeface="Arial"/>
+              </a:rPr>
+              <a:t>The FlowCore Project</a:t>
+            </a:r>
+            <a:endParaRPr lang="en-US" sz="4000" b="0" i="1" u="none" strike="noStrike">
+              <a:solidFill>
+                <a:srgbClr val="000000"/>
+              </a:solidFill>
+              <a:effectLst/>
+              <a:uFillTx/>
+              <a:latin typeface="Arial"/>
+            </a:endParaRPr>
+          </a:p>
+        </p:txBody>
+      </p:sp>
+      <p:sp>
+        <p:nvSpPr>
+          <p:cNvPr id="13" name="PlaceHolder 2"/>
+          <p:cNvSpPr txBox="1"/>
+          <p:nvPr/>
+        </p:nvSpPr>
+        <p:spPr>
+          <a:xfrm>
+            <a:off x="457200" y="3396600"/>
+            <a:ext cx="9071280" cy="946800"/>
           </a:xfrm>
           <a:prstGeom prst="rect">
             <a:avLst/>
@@ -820,7 +1026,161 @@
             <a:spAutoFit/>
           </a:bodyPr>
           <a:p>
+            <a:pPr>
+              <a:lnSpc>
+                <a:spcPct val="100000"/>
+              </a:lnSpc>
+            </a:pPr>
+            <a:r>
+              <a:rPr lang="en-US" sz="2000" b="0" i="1" u="none" strike="noStrike">
+                <a:solidFill>
+                  <a:srgbClr val="000000"/>
+                </a:solidFill>
+                <a:effectLst/>
+                <a:uFillTx/>
+                <a:latin typeface="Arial"/>
+              </a:rPr>
+              <a:t>Krallis Dimosthenis and Tagara Ioanna</a:t>
+            </a:r>
+            <a:endParaRPr lang="en-US" sz="2000" b="0" i="1" u="none" strike="noStrike">
+              <a:solidFill>
+                <a:srgbClr val="000000"/>
+              </a:solidFill>
+              <a:effectLst/>
+              <a:uFillTx/>
+              <a:latin typeface="Arial"/>
+            </a:endParaRPr>
+          </a:p>
+        </p:txBody>
+      </p:sp>
+    </p:spTree>
+  </p:cSld>
+  <mc:AlternateContent>
+    <mc:Choice Requires="p14">
+      <p:transition spd="slow" p14:dur="2000"/>
+    </mc:Choice>
+    <mc:Fallback>
+      <p:transition spd="slow"/>
+    </mc:Fallback>
+  </mc:AlternateContent>
+</p:sld>
+</file>
+
+<file path=ppt/slides/slide2.xml><?xml version="1.0" encoding="utf-8"?>
+<p:sld xmlns:a="http://schemas.openxmlformats.org/drawingml/2006/main" xmlns:p="http://schemas.openxmlformats.org/presentationml/2006/main" xmlns:r="http://schemas.openxmlformats.org/officeDocument/2006/relationships" xmlns:p14="http://schemas.microsoft.com/office/powerpoint/2010/main" xmlns:p15="http://schemas.microsoft.com/office/powerpoint/2012/main" xmlns:mc="http://schemas.openxmlformats.org/markup-compatibility/2006">
+  <p:cSld>
+    <p:spTree>
+      <p:nvGrpSpPr>
+        <p:cNvPr id="1" name=""/>
+        <p:cNvGrpSpPr/>
+        <p:nvPr/>
+      </p:nvGrpSpPr>
+      <p:grpSpPr>
+        <a:xfrm>
+          <a:off x="0" y="0"/>
+          <a:ext cx="0" cy="0"/>
+          <a:chOff x="0" y="0"/>
+          <a:chExt cx="0" cy="0"/>
+        </a:xfrm>
+      </p:grpSpPr>
+      <p:pic>
+        <p:nvPicPr>
+          <p:cNvPr id="14" name=""/>
+          <p:cNvPicPr/>
+          <p:nvPr/>
+        </p:nvPicPr>
+        <p:blipFill>
+          <a:blip r:embed="rId1"/>
+          <a:stretch/>
+        </p:blipFill>
+        <p:spPr>
+          <a:xfrm>
+            <a:off x="-21960" y="0"/>
+            <a:ext cx="10080360" cy="5670000"/>
+          </a:xfrm>
+          <a:prstGeom prst="rect">
+            <a:avLst/>
+          </a:prstGeom>
+          <a:noFill/>
+          <a:ln w="0">
+            <a:noFill/>
+          </a:ln>
+        </p:spPr>
+      </p:pic>
+      <p:sp>
+        <p:nvSpPr>
+          <p:cNvPr id="15" name="PlaceHolder 1"/>
+          <p:cNvSpPr>
+            <a:spLocks noGrp="1"/>
+          </p:cNvSpPr>
+          <p:nvPr>
+            <p:ph type="title"/>
+          </p:nvPr>
+        </p:nvSpPr>
+        <p:spPr>
+          <a:xfrm>
+            <a:off x="504000" y="386280"/>
+            <a:ext cx="9071280" cy="625320"/>
+          </a:xfrm>
+          <a:prstGeom prst="rect">
+            <a:avLst/>
+          </a:prstGeom>
+          <a:noFill/>
+          <a:ln w="0">
+            <a:noFill/>
+          </a:ln>
+        </p:spPr>
+        <p:txBody>
+          <a:bodyPr lIns="0" rIns="0" tIns="0" bIns="0" anchor="ctr">
+            <a:spAutoFit/>
+          </a:bodyPr>
+          <a:p>
             <a:pPr indent="0" algn="ctr">
+              <a:buNone/>
+            </a:pPr>
+            <a:endParaRPr lang="en-US" sz="4400" b="0" u="none" strike="noStrike">
+              <a:solidFill>
+                <a:srgbClr val="000000"/>
+              </a:solidFill>
+              <a:effectLst/>
+              <a:uFillTx/>
+              <a:latin typeface="Arial"/>
+            </a:endParaRPr>
+          </a:p>
+        </p:txBody>
+      </p:sp>
+      <p:sp>
+        <p:nvSpPr>
+          <p:cNvPr id="16" name="PlaceHolder 2"/>
+          <p:cNvSpPr>
+            <a:spLocks noGrp="1"/>
+          </p:cNvSpPr>
+          <p:nvPr>
+            <p:ph/>
+          </p:nvPr>
+        </p:nvSpPr>
+        <p:spPr>
+          <a:xfrm>
+            <a:off x="504000" y="1326600"/>
+            <a:ext cx="9072000" cy="3288600"/>
+          </a:xfrm>
+          <a:prstGeom prst="rect">
+            <a:avLst/>
+          </a:prstGeom>
+          <a:noFill/>
+          <a:ln w="0">
+            <a:noFill/>
+          </a:ln>
+        </p:spPr>
+        <p:txBody>
+          <a:bodyPr lIns="0" rIns="0" tIns="0" bIns="0" anchor="t">
+            <a:normAutofit/>
+          </a:bodyPr>
+          <a:p>
+            <a:pPr indent="0">
+              <a:spcBef>
+                <a:spcPts val="1417"/>
+              </a:spcBef>
               <a:buNone/>
             </a:pPr>
             <a:endParaRPr lang="en-US" sz="3200" b="0" u="none" strike="noStrike">

--- a/presentation/Presentation.pptx
+++ b/presentation/Presentation.pptx
@@ -384,7 +384,7 @@
                 <a:uFillTx/>
                 <a:latin typeface="Calibri"/>
               </a:rPr>
-              <a:t> </a:t>
+              <a:t>&lt;date/time&gt;</a:t>
             </a:r>
             <a:endParaRPr lang="en-US" sz="1200" b="0" u="none" strike="noStrike">
               <a:solidFill>
@@ -466,7 +466,7 @@
                 <a:uFillTx/>
                 <a:latin typeface="Calibri"/>
               </a:rPr>
-              <a:t> </a:t>
+              <a:t>&lt;footer&gt;</a:t>
             </a:r>
             <a:endParaRPr lang="en-US" sz="1200" b="0" u="none" strike="noStrike">
               <a:solidFill>
@@ -537,7 +537,7 @@
                 <a:tab algn="l" pos="0"/>
               </a:tabLst>
             </a:pPr>
-            <a:fld id="{0A242D0A-D750-4190-9A8D-3C6C38CFB6D9}" type="slidenum">
+            <a:fld id="{BF641DBC-7BC8-4F37-AE58-FF60A4E7D765}" type="slidenum">
               <a:rPr lang="en-US" sz="1200" b="0" u="none" strike="noStrike">
                 <a:solidFill>
                   <a:schemeClr val="dk1">
@@ -548,7 +548,7 @@
                 <a:uFillTx/>
                 <a:latin typeface="Calibri"/>
               </a:rPr>
-              <a:t>2</a:t>
+              <a:t>&lt;number&gt;</a:t>
             </a:fld>
             <a:endParaRPr lang="en-US" sz="1200" b="0" u="none" strike="noStrike">
               <a:solidFill>
@@ -918,7 +918,7 @@
                 <a:uFillTx/>
                 <a:latin typeface="Calibri"/>
               </a:rPr>
-              <a:t> </a:t>
+              <a:t>&lt;date/time&gt;</a:t>
             </a:r>
             <a:endParaRPr lang="en-US" sz="1200" b="0" u="none" strike="noStrike">
               <a:solidFill>
@@ -1000,7 +1000,7 @@
                 <a:uFillTx/>
                 <a:latin typeface="Calibri"/>
               </a:rPr>
-              <a:t> </a:t>
+              <a:t>&lt;footer&gt;</a:t>
             </a:r>
             <a:endParaRPr lang="en-US" sz="1200" b="0" u="none" strike="noStrike">
               <a:solidFill>
@@ -1071,7 +1071,7 @@
                 <a:tab algn="l" pos="0"/>
               </a:tabLst>
             </a:pPr>
-            <a:fld id="{4184B9A0-697A-4EDD-ADA1-6C39468C15FB}" type="slidenum">
+            <a:fld id="{7796EF2C-2C03-49AD-B7F2-1DE275574374}" type="slidenum">
               <a:rPr lang="en-US" sz="1200" b="0" u="none" strike="noStrike">
                 <a:solidFill>
                   <a:schemeClr val="dk1">
@@ -1082,7 +1082,7 @@
                 <a:uFillTx/>
                 <a:latin typeface="Calibri"/>
               </a:rPr>
-              <a:t>2</a:t>
+              <a:t>&lt;number&gt;</a:t>
             </a:fld>
             <a:endParaRPr lang="en-US" sz="1200" b="0" u="none" strike="noStrike">
               <a:solidFill>
@@ -1452,7 +1452,7 @@
                 <a:uFillTx/>
                 <a:latin typeface="Calibri"/>
               </a:rPr>
-              <a:t> </a:t>
+              <a:t>&lt;date/time&gt;</a:t>
             </a:r>
             <a:endParaRPr lang="en-US" sz="1200" b="0" u="none" strike="noStrike">
               <a:solidFill>
@@ -1534,7 +1534,7 @@
                 <a:uFillTx/>
                 <a:latin typeface="Calibri"/>
               </a:rPr>
-              <a:t> </a:t>
+              <a:t>&lt;footer&gt;</a:t>
             </a:r>
             <a:endParaRPr lang="en-US" sz="1200" b="0" u="none" strike="noStrike">
               <a:solidFill>
@@ -1605,7 +1605,7 @@
                 <a:tab algn="l" pos="0"/>
               </a:tabLst>
             </a:pPr>
-            <a:fld id="{12F614A1-9558-4295-A2AB-C33F9471F4B2}" type="slidenum">
+            <a:fld id="{8B668DCF-027B-4415-99A8-D87C73965770}" type="slidenum">
               <a:rPr lang="en-US" sz="1200" b="0" u="none" strike="noStrike">
                 <a:solidFill>
                   <a:schemeClr val="dk1">
@@ -1616,7 +1616,7 @@
                 <a:uFillTx/>
                 <a:latin typeface="Calibri"/>
               </a:rPr>
-              <a:t>2</a:t>
+              <a:t>&lt;number&gt;</a:t>
             </a:fld>
             <a:endParaRPr lang="en-US" sz="1200" b="0" u="none" strike="noStrike">
               <a:solidFill>
@@ -1787,7 +1787,7 @@
                 <a:uFillTx/>
                 <a:latin typeface="Calibri"/>
               </a:rPr>
-              <a:t> </a:t>
+              <a:t>&lt;footer&gt;</a:t>
             </a:r>
             <a:endParaRPr lang="en-US" sz="1200" b="0" u="none" strike="noStrike">
               <a:solidFill>
@@ -1858,7 +1858,7 @@
                 <a:tab algn="l" pos="0"/>
               </a:tabLst>
             </a:pPr>
-            <a:fld id="{F0543D24-D46A-4F26-ACB7-8A71E8EDD81B}" type="slidenum">
+            <a:fld id="{A45EE3C6-EF2D-4839-A16C-082A63E1E33B}" type="slidenum">
               <a:rPr lang="en-US" sz="1200" b="0" u="none" strike="noStrike">
                 <a:solidFill>
                   <a:schemeClr val="dk1">
@@ -1869,7 +1869,7 @@
                 <a:uFillTx/>
                 <a:latin typeface="Calibri"/>
               </a:rPr>
-              <a:t>2</a:t>
+              <a:t>&lt;number&gt;</a:t>
             </a:fld>
             <a:endParaRPr lang="en-US" sz="1200" b="0" u="none" strike="noStrike">
               <a:solidFill>
@@ -1947,7 +1947,7 @@
                 <a:uFillTx/>
                 <a:latin typeface="Times New Roman"/>
               </a:rPr>
-              <a:t> </a:t>
+              <a:t>&lt;date/time&gt;</a:t>
             </a:r>
             <a:endParaRPr lang="en-US" sz="1400" b="0" u="none" strike="noStrike">
               <a:solidFill>
@@ -2456,7 +2456,7 @@
                 <a:uFillTx/>
                 <a:latin typeface="Calibri"/>
               </a:rPr>
-              <a:t> </a:t>
+              <a:t>&lt;date/time&gt;</a:t>
             </a:r>
             <a:endParaRPr lang="en-US" sz="1200" b="0" u="none" strike="noStrike">
               <a:solidFill>
@@ -2538,7 +2538,7 @@
                 <a:uFillTx/>
                 <a:latin typeface="Calibri"/>
               </a:rPr>
-              <a:t> </a:t>
+              <a:t>&lt;footer&gt;</a:t>
             </a:r>
             <a:endParaRPr lang="en-US" sz="1200" b="0" u="none" strike="noStrike">
               <a:solidFill>
@@ -2609,7 +2609,7 @@
                 <a:tab algn="l" pos="0"/>
               </a:tabLst>
             </a:pPr>
-            <a:fld id="{FA72987C-1FB2-438C-95CB-75E3483AE4BA}" type="slidenum">
+            <a:fld id="{9882B631-FCD6-493F-B69C-DA98AEE8946F}" type="slidenum">
               <a:rPr lang="en-US" sz="1200" b="0" u="none" strike="noStrike">
                 <a:solidFill>
                   <a:schemeClr val="dk1">
@@ -2620,7 +2620,7 @@
                 <a:uFillTx/>
                 <a:latin typeface="Calibri"/>
               </a:rPr>
-              <a:t>2</a:t>
+              <a:t>&lt;number&gt;</a:t>
             </a:fld>
             <a:endParaRPr lang="en-US" sz="1200" b="0" u="none" strike="noStrike">
               <a:solidFill>
@@ -3189,7 +3189,7 @@
                 <a:uFillTx/>
                 <a:latin typeface="Calibri"/>
               </a:rPr>
-              <a:t> </a:t>
+              <a:t>&lt;date/time&gt;</a:t>
             </a:r>
             <a:endParaRPr lang="en-US" sz="1200" b="0" u="none" strike="noStrike">
               <a:solidFill>
@@ -3271,7 +3271,7 @@
                 <a:uFillTx/>
                 <a:latin typeface="Calibri"/>
               </a:rPr>
-              <a:t> </a:t>
+              <a:t>&lt;footer&gt;</a:t>
             </a:r>
             <a:endParaRPr lang="en-US" sz="1200" b="0" u="none" strike="noStrike">
               <a:solidFill>
@@ -3342,7 +3342,7 @@
                 <a:tab algn="l" pos="0"/>
               </a:tabLst>
             </a:pPr>
-            <a:fld id="{FEB9999D-2434-412B-85A4-2ADE5CEF5DF8}" type="slidenum">
+            <a:fld id="{6878CBF2-BAD6-4240-A76C-97661CDC0871}" type="slidenum">
               <a:rPr lang="en-US" sz="1200" b="0" u="none" strike="noStrike">
                 <a:solidFill>
                   <a:schemeClr val="dk1">
@@ -3353,7 +3353,7 @@
                 <a:uFillTx/>
                 <a:latin typeface="Calibri"/>
               </a:rPr>
-              <a:t>2</a:t>
+              <a:t>&lt;number&gt;</a:t>
             </a:fld>
             <a:endParaRPr lang="en-US" sz="1200" b="0" u="none" strike="noStrike">
               <a:solidFill>
@@ -4046,7 +4046,7 @@
                 <a:uFillTx/>
                 <a:latin typeface="Calibri"/>
               </a:rPr>
-              <a:t> </a:t>
+              <a:t>&lt;date/time&gt;</a:t>
             </a:r>
             <a:endParaRPr lang="en-US" sz="1200" b="0" u="none" strike="noStrike">
               <a:solidFill>
@@ -4128,7 +4128,7 @@
                 <a:uFillTx/>
                 <a:latin typeface="Calibri"/>
               </a:rPr>
-              <a:t> </a:t>
+              <a:t>&lt;footer&gt;</a:t>
             </a:r>
             <a:endParaRPr lang="en-US" sz="1200" b="0" u="none" strike="noStrike">
               <a:solidFill>
@@ -4199,7 +4199,7 @@
                 <a:tab algn="l" pos="0"/>
               </a:tabLst>
             </a:pPr>
-            <a:fld id="{BC09E7AC-4781-4130-A8AB-AF0A1BAEF1E5}" type="slidenum">
+            <a:fld id="{DE0833C8-701A-4AD1-A05B-E36B18983712}" type="slidenum">
               <a:rPr lang="en-US" sz="1200" b="0" u="none" strike="noStrike">
                 <a:solidFill>
                   <a:schemeClr val="dk1">
@@ -4210,7 +4210,7 @@
                 <a:uFillTx/>
                 <a:latin typeface="Calibri"/>
               </a:rPr>
-              <a:t>2</a:t>
+              <a:t>&lt;number&gt;</a:t>
             </a:fld>
             <a:endParaRPr lang="en-US" sz="1200" b="0" u="none" strike="noStrike">
               <a:solidFill>
@@ -4381,7 +4381,7 @@
                 <a:uFillTx/>
                 <a:latin typeface="Calibri"/>
               </a:rPr>
-              <a:t> </a:t>
+              <a:t>&lt;date/time&gt;</a:t>
             </a:r>
             <a:endParaRPr lang="en-US" sz="1200" b="0" u="none" strike="noStrike">
               <a:solidFill>
@@ -4463,7 +4463,7 @@
                 <a:uFillTx/>
                 <a:latin typeface="Calibri"/>
               </a:rPr>
-              <a:t> </a:t>
+              <a:t>&lt;footer&gt;</a:t>
             </a:r>
             <a:endParaRPr lang="en-US" sz="1200" b="0" u="none" strike="noStrike">
               <a:solidFill>
@@ -4534,7 +4534,7 @@
                 <a:tab algn="l" pos="0"/>
               </a:tabLst>
             </a:pPr>
-            <a:fld id="{D5A937FD-71A7-4085-BB62-4B3626613950}" type="slidenum">
+            <a:fld id="{EF470466-6A5C-4824-A6E8-B9EAD8CD222D}" type="slidenum">
               <a:rPr lang="en-US" sz="1200" b="0" u="none" strike="noStrike">
                 <a:solidFill>
                   <a:schemeClr val="dk1">
@@ -4545,7 +4545,7 @@
                 <a:uFillTx/>
                 <a:latin typeface="Calibri"/>
               </a:rPr>
-              <a:t>2</a:t>
+              <a:t>&lt;number&gt;</a:t>
             </a:fld>
             <a:endParaRPr lang="en-US" sz="1200" b="0" u="none" strike="noStrike">
               <a:solidFill>
@@ -4657,7 +4657,7 @@
                 <a:uFillTx/>
                 <a:latin typeface="Calibri"/>
               </a:rPr>
-              <a:t> </a:t>
+              <a:t>&lt;date/time&gt;</a:t>
             </a:r>
             <a:endParaRPr lang="en-US" sz="1200" b="0" u="none" strike="noStrike">
               <a:solidFill>
@@ -4739,7 +4739,7 @@
                 <a:uFillTx/>
                 <a:latin typeface="Calibri"/>
               </a:rPr>
-              <a:t> </a:t>
+              <a:t>&lt;footer&gt;</a:t>
             </a:r>
             <a:endParaRPr lang="en-US" sz="1200" b="0" u="none" strike="noStrike">
               <a:solidFill>
@@ -4810,7 +4810,7 @@
                 <a:tab algn="l" pos="0"/>
               </a:tabLst>
             </a:pPr>
-            <a:fld id="{67119220-6784-45F2-8F63-27629CB88B58}" type="slidenum">
+            <a:fld id="{66C8B2B3-1958-45EF-896D-6908F84193BC}" type="slidenum">
               <a:rPr lang="en-US" sz="1200" b="0" u="none" strike="noStrike">
                 <a:solidFill>
                   <a:schemeClr val="dk1">
@@ -4821,7 +4821,7 @@
                 <a:uFillTx/>
                 <a:latin typeface="Calibri"/>
               </a:rPr>
-              <a:t>2</a:t>
+              <a:t>&lt;number&gt;</a:t>
             </a:fld>
             <a:endParaRPr lang="en-US" sz="1200" b="0" u="none" strike="noStrike">
               <a:solidFill>
@@ -5253,7 +5253,7 @@
                 <a:uFillTx/>
                 <a:latin typeface="Calibri"/>
               </a:rPr>
-              <a:t> </a:t>
+              <a:t>&lt;date/time&gt;</a:t>
             </a:r>
             <a:endParaRPr lang="en-US" sz="1200" b="0" u="none" strike="noStrike">
               <a:solidFill>
@@ -5335,7 +5335,7 @@
                 <a:uFillTx/>
                 <a:latin typeface="Calibri"/>
               </a:rPr>
-              <a:t> </a:t>
+              <a:t>&lt;footer&gt;</a:t>
             </a:r>
             <a:endParaRPr lang="en-US" sz="1200" b="0" u="none" strike="noStrike">
               <a:solidFill>
@@ -5406,7 +5406,7 @@
                 <a:tab algn="l" pos="0"/>
               </a:tabLst>
             </a:pPr>
-            <a:fld id="{A59AB15B-025B-4C5E-99B0-06090A7C6736}" type="slidenum">
+            <a:fld id="{4CD72628-4120-46EB-A360-03D5619FD94B}" type="slidenum">
               <a:rPr lang="en-US" sz="1200" b="0" u="none" strike="noStrike">
                 <a:solidFill>
                   <a:schemeClr val="dk1">
@@ -5417,7 +5417,7 @@
                 <a:uFillTx/>
                 <a:latin typeface="Calibri"/>
               </a:rPr>
-              <a:t>2</a:t>
+              <a:t>&lt;number&gt;</a:t>
             </a:fld>
             <a:endParaRPr lang="en-US" sz="1200" b="0" u="none" strike="noStrike">
               <a:solidFill>
@@ -5709,7 +5709,7 @@
                 <a:uFillTx/>
                 <a:latin typeface="Calibri"/>
               </a:rPr>
-              <a:t> </a:t>
+              <a:t>&lt;date/time&gt;</a:t>
             </a:r>
             <a:endParaRPr lang="en-US" sz="1200" b="0" u="none" strike="noStrike">
               <a:solidFill>
@@ -5791,7 +5791,7 @@
                 <a:uFillTx/>
                 <a:latin typeface="Calibri"/>
               </a:rPr>
-              <a:t> </a:t>
+              <a:t>&lt;footer&gt;</a:t>
             </a:r>
             <a:endParaRPr lang="en-US" sz="1200" b="0" u="none" strike="noStrike">
               <a:solidFill>
@@ -5862,7 +5862,7 @@
                 <a:tab algn="l" pos="0"/>
               </a:tabLst>
             </a:pPr>
-            <a:fld id="{40F99376-45D2-43B3-BDA9-919B3FFD22D1}" type="slidenum">
+            <a:fld id="{4D3C702D-3480-479A-86D0-4F1FA1F1E266}" type="slidenum">
               <a:rPr lang="en-US" sz="1200" b="0" u="none" strike="noStrike">
                 <a:solidFill>
                   <a:schemeClr val="dk1">
@@ -5873,7 +5873,7 @@
                 <a:uFillTx/>
                 <a:latin typeface="Calibri"/>
               </a:rPr>
-              <a:t>2</a:t>
+              <a:t>&lt;number&gt;</a:t>
             </a:fld>
             <a:endParaRPr lang="en-US" sz="1200" b="0" u="none" strike="noStrike">
               <a:solidFill>
@@ -6044,7 +6044,7 @@
                 <a:uFillTx/>
                 <a:latin typeface="Calibri"/>
               </a:rPr>
-              <a:t> </a:t>
+              <a:t>&lt;date/time&gt;</a:t>
             </a:r>
             <a:endParaRPr lang="en-US" sz="1200" b="0" u="none" strike="noStrike">
               <a:solidFill>
@@ -6126,7 +6126,7 @@
                 <a:uFillTx/>
                 <a:latin typeface="Calibri"/>
               </a:rPr>
-              <a:t> </a:t>
+              <a:t>&lt;footer&gt;</a:t>
             </a:r>
             <a:endParaRPr lang="en-US" sz="1200" b="0" u="none" strike="noStrike">
               <a:solidFill>
@@ -6197,7 +6197,7 @@
                 <a:tab algn="l" pos="0"/>
               </a:tabLst>
             </a:pPr>
-            <a:fld id="{12FED4E2-9E29-422E-932B-C48F1DDB62D6}" type="slidenum">
+            <a:fld id="{5A92534A-2AC9-4A79-A0F6-0F91990EA5C8}" type="slidenum">
               <a:rPr lang="en-US" sz="1200" b="0" u="none" strike="noStrike">
                 <a:solidFill>
                   <a:schemeClr val="dk1">
@@ -6208,7 +6208,7 @@
                 <a:uFillTx/>
                 <a:latin typeface="Calibri"/>
               </a:rPr>
-              <a:t>2</a:t>
+              <a:t>&lt;number&gt;</a:t>
             </a:fld>
             <a:endParaRPr lang="en-US" sz="1200" b="0" u="none" strike="noStrike">
               <a:solidFill>
@@ -6550,8 +6550,8 @@
         </p:nvSpPr>
         <p:spPr>
           <a:xfrm>
-            <a:off x="504000" y="1600200"/>
-            <a:ext cx="10468440" cy="4114440"/>
+            <a:off x="457200" y="1231560"/>
+            <a:ext cx="10468440" cy="5397840"/>
           </a:xfrm>
           <a:prstGeom prst="rect">
             <a:avLst/>
@@ -6566,6 +6566,36 @@
             <a:noAutofit/>
           </a:bodyPr>
           <a:p>
+            <a:pPr indent="0" defTabSz="914400">
+              <a:lnSpc>
+                <a:spcPct val="90000"/>
+              </a:lnSpc>
+              <a:spcBef>
+                <a:spcPts val="1001"/>
+              </a:spcBef>
+              <a:buNone/>
+            </a:pPr>
+            <a:r>
+              <a:rPr lang="en-US" sz="2800" b="0" u="none" strike="noStrike">
+                <a:solidFill>
+                  <a:schemeClr val="dk1"/>
+                </a:solidFill>
+                <a:effectLst/>
+                <a:uFillTx/>
+                <a:latin typeface="Calibri"/>
+              </a:rPr>
+              <a:t>We have various scripts for controlling the environment as well as running the app. We have scripts for:</a:t>
+            </a:r>
+            <a:endParaRPr lang="en-US" sz="2800" b="0" u="none" strike="noStrike">
+              <a:solidFill>
+                <a:srgbClr val="000000"/>
+              </a:solidFill>
+              <a:effectLst/>
+              <a:uFillTx/>
+              <a:latin typeface="Arial"/>
+            </a:endParaRPr>
+          </a:p>
+          <a:p>
             <a:pPr marL="228600" indent="-228600" defTabSz="914400">
               <a:lnSpc>
                 <a:spcPct val="90000"/>
@@ -6588,7 +6618,207 @@
                 <a:uFillTx/>
                 <a:latin typeface="Calibri"/>
               </a:rPr>
-              <a:t>Maybe screenshots and how the bash files and linux line code is used</a:t>
+              <a:t>Backing up logs,</a:t>
+            </a:r>
+            <a:endParaRPr lang="en-US" sz="2800" b="0" u="none" strike="noStrike">
+              <a:solidFill>
+                <a:srgbClr val="000000"/>
+              </a:solidFill>
+              <a:effectLst/>
+              <a:uFillTx/>
+              <a:latin typeface="Arial"/>
+            </a:endParaRPr>
+          </a:p>
+          <a:p>
+            <a:pPr marL="228600" indent="-228600" defTabSz="914400">
+              <a:lnSpc>
+                <a:spcPct val="90000"/>
+              </a:lnSpc>
+              <a:spcBef>
+                <a:spcPts val="1001"/>
+              </a:spcBef>
+              <a:buClr>
+                <a:srgbClr val="000000"/>
+              </a:buClr>
+              <a:buFont typeface="Arial"/>
+              <a:buChar char="•"/>
+            </a:pPr>
+            <a:r>
+              <a:rPr lang="en-US" sz="2800" b="0" u="none" strike="noStrike">
+                <a:solidFill>
+                  <a:schemeClr val="dk1"/>
+                </a:solidFill>
+                <a:effectLst/>
+                <a:uFillTx/>
+                <a:latin typeface="Calibri"/>
+              </a:rPr>
+              <a:t>Running the app,</a:t>
+            </a:r>
+            <a:endParaRPr lang="en-US" sz="2800" b="0" u="none" strike="noStrike">
+              <a:solidFill>
+                <a:srgbClr val="000000"/>
+              </a:solidFill>
+              <a:effectLst/>
+              <a:uFillTx/>
+              <a:latin typeface="Arial"/>
+            </a:endParaRPr>
+          </a:p>
+          <a:p>
+            <a:pPr marL="228600" indent="-228600" defTabSz="914400">
+              <a:lnSpc>
+                <a:spcPct val="90000"/>
+              </a:lnSpc>
+              <a:spcBef>
+                <a:spcPts val="1001"/>
+              </a:spcBef>
+              <a:buClr>
+                <a:srgbClr val="000000"/>
+              </a:buClr>
+              <a:buFont typeface="Arial"/>
+              <a:buChar char="•"/>
+            </a:pPr>
+            <a:r>
+              <a:rPr lang="en-US" sz="2800" b="0" u="none" strike="noStrike">
+                <a:solidFill>
+                  <a:schemeClr val="dk1"/>
+                </a:solidFill>
+                <a:effectLst/>
+                <a:uFillTx/>
+                <a:latin typeface="Calibri"/>
+              </a:rPr>
+              <a:t>Running the tests,</a:t>
+            </a:r>
+            <a:endParaRPr lang="en-US" sz="2800" b="0" u="none" strike="noStrike">
+              <a:solidFill>
+                <a:srgbClr val="000000"/>
+              </a:solidFill>
+              <a:effectLst/>
+              <a:uFillTx/>
+              <a:latin typeface="Arial"/>
+            </a:endParaRPr>
+          </a:p>
+          <a:p>
+            <a:pPr marL="228600" indent="-228600" defTabSz="914400">
+              <a:lnSpc>
+                <a:spcPct val="90000"/>
+              </a:lnSpc>
+              <a:spcBef>
+                <a:spcPts val="1001"/>
+              </a:spcBef>
+              <a:buClr>
+                <a:srgbClr val="000000"/>
+              </a:buClr>
+              <a:buFont typeface="Arial"/>
+              <a:buChar char="•"/>
+            </a:pPr>
+            <a:r>
+              <a:rPr lang="en-US" sz="2800" b="0" u="none" strike="noStrike">
+                <a:solidFill>
+                  <a:schemeClr val="dk1"/>
+                </a:solidFill>
+                <a:effectLst/>
+                <a:uFillTx/>
+                <a:latin typeface="Calibri"/>
+              </a:rPr>
+              <a:t>Building the app,</a:t>
+            </a:r>
+            <a:endParaRPr lang="en-US" sz="2800" b="0" u="none" strike="noStrike">
+              <a:solidFill>
+                <a:srgbClr val="000000"/>
+              </a:solidFill>
+              <a:effectLst/>
+              <a:uFillTx/>
+              <a:latin typeface="Arial"/>
+            </a:endParaRPr>
+          </a:p>
+          <a:p>
+            <a:pPr marL="228600" indent="-228600" defTabSz="914400">
+              <a:lnSpc>
+                <a:spcPct val="90000"/>
+              </a:lnSpc>
+              <a:spcBef>
+                <a:spcPts val="1001"/>
+              </a:spcBef>
+              <a:buClr>
+                <a:srgbClr val="000000"/>
+              </a:buClr>
+              <a:buFont typeface="Arial"/>
+              <a:buChar char="•"/>
+            </a:pPr>
+            <a:r>
+              <a:rPr lang="en-US" sz="2800" b="0" u="none" strike="noStrike">
+                <a:solidFill>
+                  <a:schemeClr val="dk1"/>
+                </a:solidFill>
+                <a:effectLst/>
+                <a:uFillTx/>
+                <a:latin typeface="Calibri"/>
+              </a:rPr>
+              <a:t>Initializing the database and</a:t>
+            </a:r>
+            <a:endParaRPr lang="en-US" sz="2800" b="0" u="none" strike="noStrike">
+              <a:solidFill>
+                <a:srgbClr val="000000"/>
+              </a:solidFill>
+              <a:effectLst/>
+              <a:uFillTx/>
+              <a:latin typeface="Arial"/>
+            </a:endParaRPr>
+          </a:p>
+          <a:p>
+            <a:pPr marL="228600" indent="-228600" defTabSz="914400">
+              <a:lnSpc>
+                <a:spcPct val="90000"/>
+              </a:lnSpc>
+              <a:spcBef>
+                <a:spcPts val="1001"/>
+              </a:spcBef>
+              <a:buClr>
+                <a:srgbClr val="000000"/>
+              </a:buClr>
+              <a:buFont typeface="Arial"/>
+              <a:buChar char="•"/>
+            </a:pPr>
+            <a:r>
+              <a:rPr lang="en-US" sz="2800" b="0" u="none" strike="noStrike">
+                <a:solidFill>
+                  <a:schemeClr val="dk1"/>
+                </a:solidFill>
+                <a:effectLst/>
+                <a:uFillTx/>
+                <a:latin typeface="Calibri"/>
+              </a:rPr>
+              <a:t>Entering a docker environment as the app for testing purposes</a:t>
+            </a:r>
+            <a:endParaRPr lang="en-US" sz="2800" b="0" u="none" strike="noStrike">
+              <a:solidFill>
+                <a:srgbClr val="000000"/>
+              </a:solidFill>
+              <a:effectLst/>
+              <a:uFillTx/>
+              <a:latin typeface="Arial"/>
+            </a:endParaRPr>
+          </a:p>
+          <a:p>
+            <a:pPr indent="0" defTabSz="914400">
+              <a:lnSpc>
+                <a:spcPct val="90000"/>
+              </a:lnSpc>
+              <a:spcBef>
+                <a:spcPts val="1001"/>
+              </a:spcBef>
+              <a:buNone/>
+            </a:pPr>
+            <a:r>
+              <a:rPr lang="en-US" sz="2800" b="0" u="none" strike="noStrike">
+                <a:solidFill>
+                  <a:schemeClr val="dk1"/>
+                </a:solidFill>
+                <a:effectLst/>
+                <a:uFillTx/>
+                <a:latin typeface="Calibri"/>
+              </a:rPr>
+              <a:t>There are more scripts meant to be ran inside the container such as build and test scripts.</a:t>
             </a:r>
             <a:endParaRPr lang="en-US" sz="2800" b="0" u="none" strike="noStrike">
               <a:solidFill>
@@ -7377,8 +7607,8 @@
         </p:nvSpPr>
         <p:spPr>
           <a:xfrm>
-            <a:off x="504000" y="2776680"/>
-            <a:ext cx="9070560" cy="386640"/>
+            <a:off x="504000" y="1600200"/>
+            <a:ext cx="10926000" cy="4343400"/>
           </a:xfrm>
           <a:prstGeom prst="rect">
             <a:avLst/>
@@ -7393,18 +7623,14 @@
             <a:noAutofit/>
           </a:bodyPr>
           <a:p>
-            <a:pPr marL="228600" indent="-228600" defTabSz="914400">
+            <a:pPr indent="0" defTabSz="914400">
               <a:lnSpc>
                 <a:spcPct val="90000"/>
               </a:lnSpc>
               <a:spcBef>
                 <a:spcPts val="1001"/>
               </a:spcBef>
-              <a:buClr>
-                <a:srgbClr val="000000"/>
-              </a:buClr>
-              <a:buFont typeface="Arial"/>
-              <a:buChar char="•"/>
+              <a:buNone/>
             </a:pPr>
             <a:r>
               <a:rPr lang="en-US" sz="2800" b="0" u="none" strike="noStrike">
@@ -7415,7 +7641,7 @@
                 <a:uFillTx/>
                 <a:latin typeface="Calibri"/>
               </a:rPr>
-              <a:t>The testing we did and what we expectes vs what we got</a:t>
+              <a:t>We have created scripts that aid in the creation of a controlled environment for testing so that we can easily check differences from normal to abnormal behaviour.</a:t>
             </a:r>
             <a:endParaRPr lang="en-US" sz="2800" b="0" u="none" strike="noStrike">
               <a:solidFill>
@@ -7563,7 +7789,147 @@
                 <a:uFillTx/>
                 <a:latin typeface="Arial"/>
               </a:rPr>
-              <a:t>There were many challenges. Mainly</a:t>
+              <a:t>There were many challenges. Mainly:</a:t>
+            </a:r>
+            <a:endParaRPr lang="en-US" sz="3200" b="0" u="none" strike="noStrike">
+              <a:solidFill>
+                <a:srgbClr val="000000"/>
+              </a:solidFill>
+              <a:effectLst/>
+              <a:uFillTx/>
+              <a:latin typeface="Arial"/>
+            </a:endParaRPr>
+          </a:p>
+          <a:p>
+            <a:pPr marL="216000" indent="-216000">
+              <a:lnSpc>
+                <a:spcPct val="100000"/>
+              </a:lnSpc>
+              <a:buClr>
+                <a:srgbClr val="000000"/>
+              </a:buClr>
+              <a:buSzPct val="45000"/>
+              <a:buFont typeface="Wingdings" charset="2"/>
+              <a:buChar char=""/>
+              <a:tabLst>
+                <a:tab algn="l" pos="0"/>
+              </a:tabLst>
+            </a:pPr>
+            <a:r>
+              <a:rPr lang="en-US" sz="3200" b="0" u="none" strike="noStrike">
+                <a:solidFill>
+                  <a:srgbClr val="000000"/>
+                </a:solidFill>
+                <a:effectLst/>
+                <a:uFillTx/>
+                <a:latin typeface="Arial"/>
+              </a:rPr>
+              <a:t>The management and figuring out the structure as well as the database schema,</a:t>
+            </a:r>
+            <a:endParaRPr lang="en-US" sz="3200" b="0" u="none" strike="noStrike">
+              <a:solidFill>
+                <a:srgbClr val="000000"/>
+              </a:solidFill>
+              <a:effectLst/>
+              <a:uFillTx/>
+              <a:latin typeface="Arial"/>
+            </a:endParaRPr>
+          </a:p>
+          <a:p>
+            <a:pPr marL="216000" indent="-216000">
+              <a:lnSpc>
+                <a:spcPct val="100000"/>
+              </a:lnSpc>
+              <a:buClr>
+                <a:srgbClr val="000000"/>
+              </a:buClr>
+              <a:buSzPct val="45000"/>
+              <a:buFont typeface="Wingdings" charset="2"/>
+              <a:buChar char=""/>
+              <a:tabLst>
+                <a:tab algn="l" pos="0"/>
+              </a:tabLst>
+            </a:pPr>
+            <a:r>
+              <a:rPr lang="en-US" sz="3200" b="0" u="none" strike="noStrike">
+                <a:solidFill>
+                  <a:srgbClr val="000000"/>
+                </a:solidFill>
+                <a:effectLst/>
+                <a:uFillTx/>
+                <a:latin typeface="Arial"/>
+              </a:rPr>
+              <a:t>The class hierarchy and attributes of those classes,</a:t>
+            </a:r>
+            <a:endParaRPr lang="en-US" sz="3200" b="0" u="none" strike="noStrike">
+              <a:solidFill>
+                <a:srgbClr val="000000"/>
+              </a:solidFill>
+              <a:effectLst/>
+              <a:uFillTx/>
+              <a:latin typeface="Arial"/>
+            </a:endParaRPr>
+          </a:p>
+          <a:p>
+            <a:pPr marL="216000" indent="-216000">
+              <a:lnSpc>
+                <a:spcPct val="100000"/>
+              </a:lnSpc>
+              <a:buClr>
+                <a:srgbClr val="000000"/>
+              </a:buClr>
+              <a:buSzPct val="45000"/>
+              <a:buFont typeface="Wingdings" charset="2"/>
+              <a:buChar char=""/>
+              <a:tabLst>
+                <a:tab algn="l" pos="0"/>
+              </a:tabLst>
+            </a:pPr>
+            <a:r>
+              <a:rPr lang="en-US" sz="3200" b="0" u="none" strike="noStrike">
+                <a:solidFill>
+                  <a:srgbClr val="000000"/>
+                </a:solidFill>
+                <a:effectLst/>
+                <a:uFillTx/>
+                <a:latin typeface="Arial"/>
+              </a:rPr>
+              <a:t>Database trigger configuration,</a:t>
+            </a:r>
+            <a:endParaRPr lang="en-US" sz="3200" b="0" u="none" strike="noStrike">
+              <a:solidFill>
+                <a:srgbClr val="000000"/>
+              </a:solidFill>
+              <a:effectLst/>
+              <a:uFillTx/>
+              <a:latin typeface="Arial"/>
+            </a:endParaRPr>
+          </a:p>
+          <a:p>
+            <a:pPr marL="216000" indent="-216000">
+              <a:lnSpc>
+                <a:spcPct val="100000"/>
+              </a:lnSpc>
+              <a:buClr>
+                <a:srgbClr val="000000"/>
+              </a:buClr>
+              <a:buSzPct val="45000"/>
+              <a:buFont typeface="Wingdings" charset="2"/>
+              <a:buChar char=""/>
+              <a:tabLst>
+                <a:tab algn="l" pos="0"/>
+              </a:tabLst>
+            </a:pPr>
+            <a:r>
+              <a:rPr lang="en-US" sz="3200" b="0" u="none" strike="noStrike">
+                <a:solidFill>
+                  <a:srgbClr val="000000"/>
+                </a:solidFill>
+                <a:effectLst/>
+                <a:uFillTx/>
+                <a:latin typeface="Arial"/>
+              </a:rPr>
+              <a:t>Version control mistake management ect.</a:t>
             </a:r>
             <a:endParaRPr lang="en-US" sz="3200" b="0" u="none" strike="noStrike">
               <a:solidFill>
@@ -8081,8 +8447,8 @@
         </p:nvSpPr>
         <p:spPr>
           <a:xfrm>
-            <a:off x="504000" y="2776680"/>
-            <a:ext cx="9070560" cy="386640"/>
+            <a:off x="504000" y="1600200"/>
+            <a:ext cx="10468800" cy="4343400"/>
           </a:xfrm>
           <a:prstGeom prst="rect">
             <a:avLst/>
@@ -8118,7 +8484,7 @@
                 <a:uFillTx/>
                 <a:latin typeface="Calibri"/>
               </a:rPr>
-              <a:t>The things we can change and improve</a:t>
+              <a:t>A multi-toat order could be something a future version could use. A daemon-ful version as well.</a:t>
             </a:r>
             <a:endParaRPr lang="en-US" sz="2800" b="0" u="none" strike="noStrike">
               <a:solidFill>
@@ -9479,8 +9845,8 @@
         </p:nvSpPr>
         <p:spPr>
           <a:xfrm>
-            <a:off x="504000" y="2583000"/>
-            <a:ext cx="9070560" cy="774360"/>
+            <a:off x="504000" y="1371600"/>
+            <a:ext cx="10697400" cy="4343400"/>
           </a:xfrm>
           <a:prstGeom prst="rect">
             <a:avLst/>
@@ -9495,18 +9861,14 @@
             <a:noAutofit/>
           </a:bodyPr>
           <a:p>
-            <a:pPr marL="228600" indent="-228600" defTabSz="914400">
+            <a:pPr indent="0" defTabSz="914400">
               <a:lnSpc>
                 <a:spcPct val="90000"/>
               </a:lnSpc>
               <a:spcBef>
                 <a:spcPts val="1001"/>
               </a:spcBef>
-              <a:buClr>
-                <a:srgbClr val="000000"/>
-              </a:buClr>
-              <a:buFont typeface="Arial"/>
-              <a:buChar char="•"/>
+              <a:buNone/>
             </a:pPr>
             <a:r>
               <a:rPr lang="en-US" sz="2800" b="0" u="none" strike="noStrike">
@@ -9517,7 +9879,7 @@
                 <a:uFillTx/>
                 <a:latin typeface="Calibri"/>
               </a:rPr>
-              <a:t>The this that will take as granded like the storage is given ath restock is handled outside the system ect.</a:t>
+              <a:t>The system works with the basis of a simple daemonless WMS. It has one stock line as inventory since it simulates a simple warehouse. It keeps orders in-memory since they are not meant to be visible to the WCS and it selects products to be placed in toats. It only uses one toat per order.</a:t>
             </a:r>
             <a:endParaRPr lang="en-US" sz="2800" b="0" u="none" strike="noStrike">
               <a:solidFill>
@@ -9866,8 +10228,8 @@
         </p:nvSpPr>
         <p:spPr>
           <a:xfrm>
-            <a:off x="504000" y="1442520"/>
-            <a:ext cx="10925280" cy="4957560"/>
+            <a:off x="504000" y="1143000"/>
+            <a:ext cx="10925280" cy="5715000"/>
           </a:xfrm>
           <a:prstGeom prst="rect">
             <a:avLst/>
@@ -10273,6 +10635,54 @@
                 <a:latin typeface="Calibri"/>
               </a:rPr>
               <a:t> for C++ compilation.</a:t>
+            </a:r>
+            <a:endParaRPr lang="en-US" sz="2800" b="0" u="none" strike="noStrike">
+              <a:solidFill>
+                <a:srgbClr val="000000"/>
+              </a:solidFill>
+              <a:effectLst/>
+              <a:uFillTx/>
+              <a:latin typeface="Arial"/>
+            </a:endParaRPr>
+          </a:p>
+          <a:p>
+            <a:pPr marL="228600" indent="-228600" defTabSz="914400">
+              <a:lnSpc>
+                <a:spcPct val="90000"/>
+              </a:lnSpc>
+              <a:spcBef>
+                <a:spcPts val="1001"/>
+              </a:spcBef>
+              <a:buClr>
+                <a:srgbClr val="000000"/>
+              </a:buClr>
+              <a:buFont typeface="Arial"/>
+              <a:buChar char="•"/>
+              <a:tabLst>
+                <a:tab algn="l" pos="0"/>
+              </a:tabLst>
+            </a:pPr>
+            <a:r>
+              <a:rPr lang="en-US" sz="2800" b="1" u="none" strike="noStrike">
+                <a:solidFill>
+                  <a:schemeClr val="dk1"/>
+                </a:solidFill>
+                <a:effectLst/>
+                <a:uFillTx/>
+                <a:latin typeface="Calibri"/>
+              </a:rPr>
+              <a:t>Oracle SQL*PLUS</a:t>
+            </a:r>
+            <a:r>
+              <a:rPr lang="en-US" sz="2800" b="0" u="none" strike="noStrike">
+                <a:solidFill>
+                  <a:schemeClr val="dk1"/>
+                </a:solidFill>
+                <a:effectLst/>
+                <a:uFillTx/>
+                <a:latin typeface="Calibri"/>
+              </a:rPr>
+              <a:t> for database manipulation through scripting</a:t>
             </a:r>
             <a:endParaRPr lang="en-US" sz="2800" b="0" u="none" strike="noStrike">
               <a:solidFill>
